--- a/ゲーム科2年/01_後期/ゲームプログラミング応用Ⅰ/08_トゥーンシェーダーRamp編.pptx
+++ b/ゲーム科2年/01_後期/ゲームプログラミング応用Ⅰ/08_トゥーンシェーダーRamp編.pptx
@@ -267,7 +267,7 @@
           <a:p>
             <a:fld id="{E9CC885B-4903-4D54-9A93-00025F12DED9}" type="datetimeFigureOut">
               <a:rPr kumimoji="1" lang="ja-JP" altLang="en-US" smtClean="0"/>
-              <a:t>2025/7/24</a:t>
+              <a:t>2025/7/31</a:t>
             </a:fld>
             <a:endParaRPr kumimoji="1" lang="ja-JP" altLang="en-US"/>
           </a:p>
@@ -497,7 +497,7 @@
           <a:p>
             <a:fld id="{E9CC885B-4903-4D54-9A93-00025F12DED9}" type="datetimeFigureOut">
               <a:rPr kumimoji="1" lang="ja-JP" altLang="en-US" smtClean="0"/>
-              <a:t>2025/7/24</a:t>
+              <a:t>2025/7/31</a:t>
             </a:fld>
             <a:endParaRPr kumimoji="1" lang="ja-JP" altLang="en-US"/>
           </a:p>
@@ -737,7 +737,7 @@
           <a:p>
             <a:fld id="{E9CC885B-4903-4D54-9A93-00025F12DED9}" type="datetimeFigureOut">
               <a:rPr kumimoji="1" lang="ja-JP" altLang="en-US" smtClean="0"/>
-              <a:t>2025/7/24</a:t>
+              <a:t>2025/7/31</a:t>
             </a:fld>
             <a:endParaRPr kumimoji="1" lang="ja-JP" altLang="en-US"/>
           </a:p>
@@ -967,7 +967,7 @@
           <a:p>
             <a:fld id="{E9CC885B-4903-4D54-9A93-00025F12DED9}" type="datetimeFigureOut">
               <a:rPr kumimoji="1" lang="ja-JP" altLang="en-US" smtClean="0"/>
-              <a:t>2025/7/24</a:t>
+              <a:t>2025/7/31</a:t>
             </a:fld>
             <a:endParaRPr kumimoji="1" lang="ja-JP" altLang="en-US"/>
           </a:p>
@@ -1242,7 +1242,7 @@
           <a:p>
             <a:fld id="{E9CC885B-4903-4D54-9A93-00025F12DED9}" type="datetimeFigureOut">
               <a:rPr kumimoji="1" lang="ja-JP" altLang="en-US" smtClean="0"/>
-              <a:t>2025/7/24</a:t>
+              <a:t>2025/7/31</a:t>
             </a:fld>
             <a:endParaRPr kumimoji="1" lang="ja-JP" altLang="en-US"/>
           </a:p>
@@ -1571,7 +1571,7 @@
           <a:p>
             <a:fld id="{E9CC885B-4903-4D54-9A93-00025F12DED9}" type="datetimeFigureOut">
               <a:rPr kumimoji="1" lang="ja-JP" altLang="en-US" smtClean="0"/>
-              <a:t>2025/7/24</a:t>
+              <a:t>2025/7/31</a:t>
             </a:fld>
             <a:endParaRPr kumimoji="1" lang="ja-JP" altLang="en-US"/>
           </a:p>
@@ -2047,7 +2047,7 @@
           <a:p>
             <a:fld id="{E9CC885B-4903-4D54-9A93-00025F12DED9}" type="datetimeFigureOut">
               <a:rPr kumimoji="1" lang="ja-JP" altLang="en-US" smtClean="0"/>
-              <a:t>2025/7/24</a:t>
+              <a:t>2025/7/31</a:t>
             </a:fld>
             <a:endParaRPr kumimoji="1" lang="ja-JP" altLang="en-US"/>
           </a:p>
@@ -2188,7 +2188,7 @@
           <a:p>
             <a:fld id="{E9CC885B-4903-4D54-9A93-00025F12DED9}" type="datetimeFigureOut">
               <a:rPr kumimoji="1" lang="ja-JP" altLang="en-US" smtClean="0"/>
-              <a:t>2025/7/24</a:t>
+              <a:t>2025/7/31</a:t>
             </a:fld>
             <a:endParaRPr kumimoji="1" lang="ja-JP" altLang="en-US"/>
           </a:p>
@@ -2301,7 +2301,7 @@
           <a:p>
             <a:fld id="{E9CC885B-4903-4D54-9A93-00025F12DED9}" type="datetimeFigureOut">
               <a:rPr kumimoji="1" lang="ja-JP" altLang="en-US" smtClean="0"/>
-              <a:t>2025/7/24</a:t>
+              <a:t>2025/7/31</a:t>
             </a:fld>
             <a:endParaRPr kumimoji="1" lang="ja-JP" altLang="en-US"/>
           </a:p>
@@ -2644,7 +2644,7 @@
           <a:p>
             <a:fld id="{E9CC885B-4903-4D54-9A93-00025F12DED9}" type="datetimeFigureOut">
               <a:rPr kumimoji="1" lang="ja-JP" altLang="en-US" smtClean="0"/>
-              <a:t>2025/7/24</a:t>
+              <a:t>2025/7/31</a:t>
             </a:fld>
             <a:endParaRPr kumimoji="1" lang="ja-JP" altLang="en-US"/>
           </a:p>
@@ -2932,7 +2932,7 @@
           <a:p>
             <a:fld id="{E9CC885B-4903-4D54-9A93-00025F12DED9}" type="datetimeFigureOut">
               <a:rPr kumimoji="1" lang="ja-JP" altLang="en-US" smtClean="0"/>
-              <a:t>2025/7/24</a:t>
+              <a:t>2025/7/31</a:t>
             </a:fld>
             <a:endParaRPr kumimoji="1" lang="ja-JP" altLang="en-US"/>
           </a:p>
@@ -3205,7 +3205,7 @@
           <a:p>
             <a:fld id="{E9CC885B-4903-4D54-9A93-00025F12DED9}" type="datetimeFigureOut">
               <a:rPr kumimoji="1" lang="ja-JP" altLang="en-US" smtClean="0"/>
-              <a:t>2025/7/24</a:t>
+              <a:t>2025/7/31</a:t>
             </a:fld>
             <a:endParaRPr kumimoji="1" lang="ja-JP" altLang="en-US"/>
           </a:p>
@@ -5324,7 +5324,15 @@
             <a:pPr algn="ctr"/>
             <a:r>
               <a:rPr lang="en-US" altLang="ja-JP" sz="2400" dirty="0"/>
-              <a:t>(dot=0)</a:t>
+              <a:t>(dot=</a:t>
+            </a:r>
+            <a:r>
+              <a:rPr lang="ja-JP" altLang="en-US" sz="2400" dirty="0"/>
+              <a:t>ー</a:t>
+            </a:r>
+            <a:r>
+              <a:rPr lang="en-US" altLang="ja-JP" sz="2400" dirty="0"/>
+              <a:t>1)</a:t>
             </a:r>
           </a:p>
         </p:txBody>
